--- a/CIRCUITOS DIGITAIS/TRABALHO FINAL/apresentacao.pptx
+++ b/CIRCUITOS DIGITAIS/TRABALHO FINAL/apresentacao.pptx
@@ -11,17 +11,27 @@
     <p:sldId id="259" r:id="rId9"/>
     <p:sldId id="260" r:id="rId10"/>
     <p:sldId id="261" r:id="rId11"/>
+    <p:sldId id="262" r:id="rId12"/>
+    <p:sldId id="263" r:id="rId13"/>
   </p:sldIdLst>
   <p:sldSz cx="18288000" cy="10287000"/>
   <p:notesSz cx="6858000" cy="9144000"/>
   <p:embeddedFontLst>
     <p:embeddedFont>
       <p:font typeface="Sabon Italics" charset="1" panose="02020502050506090303"/>
-      <p:regular r:id="rId12"/>
+      <p:regular r:id="rId14"/>
     </p:embeddedFont>
     <p:embeddedFont>
       <p:font typeface="Migra Ultra-Bold Italics" charset="1" panose="00000900000000000000"/>
-      <p:regular r:id="rId13"/>
+      <p:regular r:id="rId15"/>
+    </p:embeddedFont>
+    <p:embeddedFont>
+      <p:font typeface="Open Sauce Bold Italics" charset="1" panose="00000800000000000000"/>
+      <p:regular r:id="rId16"/>
+    </p:embeddedFont>
+    <p:embeddedFont>
+      <p:font typeface="Open Sauce Italics" charset="1" panose="00000500000000000000"/>
+      <p:regular r:id="rId17"/>
     </p:embeddedFont>
   </p:embeddedFontLst>
   <p:defaultTextStyle>
@@ -3180,7 +3190,7 @@
         </p:nvSpPr>
         <p:spPr>
           <a:xfrm rot="0">
-            <a:off x="4379688" y="4446371"/>
+            <a:off x="4379688" y="4325534"/>
             <a:ext cx="9528625" cy="2099694"/>
           </a:xfrm>
           <a:prstGeom prst="rect">
@@ -3265,7 +3275,7 @@
                 <a:cs typeface="Sabon Italics"/>
                 <a:sym typeface="Sabon Italics"/>
               </a:rPr>
-              <a:t>VANTAGENS DO USO</a:t>
+              <a:t>VANTAGENS E GANHOS</a:t>
             </a:r>
           </a:p>
         </p:txBody>
@@ -3278,7 +3288,7 @@
         </p:nvSpPr>
         <p:spPr>
           <a:xfrm flipH="false" flipV="false" rot="0">
-            <a:off x="5486400" y="6831815"/>
+            <a:off x="5486400" y="6902924"/>
             <a:ext cx="7315200" cy="651718"/>
           </a:xfrm>
           <a:custGeom>
@@ -3296,10 +3306,10 @@
                   <a:pt x="7315200" y="0"/>
                 </a:lnTo>
                 <a:lnTo>
-                  <a:pt x="7315200" y="651718"/>
-                </a:lnTo>
-                <a:lnTo>
-                  <a:pt x="0" y="651718"/>
+                  <a:pt x="7315200" y="651717"/>
+                </a:lnTo>
+                <a:lnTo>
+                  <a:pt x="0" y="651717"/>
                 </a:lnTo>
                 <a:lnTo>
                   <a:pt x="0" y="0"/>
@@ -3351,7 +3361,7 @@
             <a:r>
               <a:rPr lang="en-US" sz="5852" i="true" spc="877">
                 <a:solidFill>
-                  <a:srgbClr val="8B61C2"/>
+                  <a:srgbClr val="5DB2E7"/>
                 </a:solidFill>
                 <a:latin typeface="Sabon Italics"/>
                 <a:ea typeface="Sabon Italics"/>
@@ -3371,8 +3381,8 @@
         </p:nvSpPr>
         <p:spPr>
           <a:xfrm rot="0">
-            <a:off x="2581945" y="1724025"/>
-            <a:ext cx="13124111" cy="2492738"/>
+            <a:off x="2581945" y="1104205"/>
+            <a:ext cx="13124111" cy="3278479"/>
           </a:xfrm>
           <a:prstGeom prst="rect">
             <a:avLst/>
@@ -3386,7 +3396,7 @@
           <a:p>
             <a:pPr algn="ctr">
               <a:lnSpc>
-                <a:spcPts val="10581"/>
+                <a:spcPts val="14487"/>
               </a:lnSpc>
             </a:pPr>
             <a:r>
@@ -3399,13 +3409,25 @@
                 <a:cs typeface="Migra Ultra-Bold Italics"/>
                 <a:sym typeface="Migra Ultra-Bold Italics"/>
               </a:rPr>
-              <a:t> COMPUTAÇÃO</a:t>
+              <a:t> </a:t>
+            </a:r>
+            <a:r>
+              <a:rPr lang="en-US" b="true" sz="16278" i="true">
+                <a:solidFill>
+                  <a:srgbClr val="5DB2E7"/>
+                </a:solidFill>
+                <a:latin typeface="Migra Ultra-Bold Italics"/>
+                <a:ea typeface="Migra Ultra-Bold Italics"/>
+                <a:cs typeface="Migra Ultra-Bold Italics"/>
+                <a:sym typeface="Migra Ultra-Bold Italics"/>
+              </a:rPr>
+              <a:t>COMPUTAÇÃO</a:t>
             </a:r>
           </a:p>
           <a:p>
             <a:pPr algn="ctr">
               <a:lnSpc>
-                <a:spcPts val="7093"/>
+                <a:spcPts val="9713"/>
               </a:lnSpc>
             </a:pPr>
             <a:r>
@@ -3652,14 +3674,14 @@
             <a:r>
               <a:rPr lang="en-US" sz="3999" i="true" spc="599">
                 <a:solidFill>
-                  <a:srgbClr val="8B61C2"/>
+                  <a:srgbClr val="5DB2E7"/>
                 </a:solidFill>
                 <a:latin typeface="Sabon Italics"/>
                 <a:ea typeface="Sabon Italics"/>
                 <a:cs typeface="Sabon Italics"/>
                 <a:sym typeface="Sabon Italics"/>
               </a:rPr>
-              <a:t>COMPUTAÇÃO</a:t>
+              <a:t>COMPUTAÇÃO </a:t>
             </a:r>
             <a:r>
               <a:rPr lang="en-US" sz="3999" i="true" spc="599">
@@ -3671,7 +3693,7 @@
                 <a:cs typeface="Sabon Italics"/>
                 <a:sym typeface="Sabon Italics"/>
               </a:rPr>
-              <a:t> INSPIRADA NO CÉREBRO HUMANO</a:t>
+              <a:t>INSPIRADA NO CÉREBRO HUMANO</a:t>
             </a:r>
           </a:p>
         </p:txBody>
@@ -3717,7 +3739,7 @@
             <a:r>
               <a:rPr lang="en-US" sz="3999" i="true" spc="599">
                 <a:solidFill>
-                  <a:srgbClr val="8B61C2"/>
+                  <a:srgbClr val="5DB2E7"/>
                 </a:solidFill>
                 <a:latin typeface="Sabon Italics"/>
                 <a:ea typeface="Sabon Italics"/>
@@ -3741,7 +3763,7 @@
             <a:r>
               <a:rPr lang="en-US" sz="3999" i="true" spc="599">
                 <a:solidFill>
-                  <a:srgbClr val="8B61C2"/>
+                  <a:srgbClr val="5DB2E7"/>
                 </a:solidFill>
                 <a:latin typeface="Sabon Italics"/>
                 <a:ea typeface="Sabon Italics"/>
@@ -3806,7 +3828,7 @@
             <a:r>
               <a:rPr lang="en-US" sz="3999" i="true" spc="599">
                 <a:solidFill>
-                  <a:srgbClr val="8B61C2"/>
+                  <a:srgbClr val="5DB2E7"/>
                 </a:solidFill>
                 <a:latin typeface="Sabon Italics"/>
                 <a:ea typeface="Sabon Italics"/>
@@ -4072,14 +4094,14 @@
             <a:r>
               <a:rPr lang="en-US" sz="3823" i="true" spc="573">
                 <a:solidFill>
-                  <a:srgbClr val="8B61C2"/>
+                  <a:srgbClr val="5DB2E7"/>
                 </a:solidFill>
                 <a:latin typeface="Sabon Italics"/>
                 <a:ea typeface="Sabon Italics"/>
                 <a:cs typeface="Sabon Italics"/>
                 <a:sym typeface="Sabon Italics"/>
               </a:rPr>
-              <a:t>ARQUITETURA TRADICIONAL</a:t>
+              <a:t>ARQUITETURA TRADICIONAL:</a:t>
             </a:r>
             <a:r>
               <a:rPr lang="en-US" sz="3823" i="true" spc="573">
@@ -4091,7 +4113,7 @@
                 <a:cs typeface="Sabon Italics"/>
                 <a:sym typeface="Sabon Italics"/>
               </a:rPr>
-              <a:t>: PC’S USAM A ARQUITETURA DE VON NEUMANN (PROCESSADOR SEPARADO DA MEMÓRIA).</a:t>
+              <a:t> PC’S USAM A ARQUITETURA DE VON NEUMANN (PROCESSADOR SEPARADO DA MEMÓRIA).</a:t>
             </a:r>
           </a:p>
         </p:txBody>
@@ -4125,7 +4147,7 @@
             <a:r>
               <a:rPr lang="en-US" sz="3999" i="true" spc="599">
                 <a:solidFill>
-                  <a:srgbClr val="8B61C2"/>
+                  <a:srgbClr val="5DB2E7"/>
                 </a:solidFill>
                 <a:latin typeface="Sabon Italics"/>
                 <a:ea typeface="Sabon Italics"/>
@@ -4178,14 +4200,14 @@
             <a:r>
               <a:rPr lang="en-US" sz="3999" i="true" spc="599">
                 <a:solidFill>
-                  <a:srgbClr val="8B61C2"/>
+                  <a:srgbClr val="5DB2E7"/>
                 </a:solidFill>
                 <a:latin typeface="Sabon Italics"/>
                 <a:ea typeface="Sabon Italics"/>
                 <a:cs typeface="Sabon Italics"/>
                 <a:sym typeface="Sabon Italics"/>
               </a:rPr>
-              <a:t>IMPACTO</a:t>
+              <a:t>IMPACTO:</a:t>
             </a:r>
             <a:r>
               <a:rPr lang="en-US" sz="3999" i="true" spc="599">
@@ -4197,7 +4219,7 @@
                 <a:cs typeface="Sabon Italics"/>
                 <a:sym typeface="Sabon Italics"/>
               </a:rPr>
-              <a:t>: MAIOR EFICIÊNCIA EM TAREFAS ESPECÍFICAS, COMO RECONHECIMENTO DE PADRÕES, E MENOR GASTO DE ENERGIA</a:t>
+              <a:t> MAIOR EFICIÊNCIA EM TAREFAS ESPECÍFICAS, COMO RECONHECIMENTO DE PADRÕES, E MENOR GASTO DE ENERGIA</a:t>
             </a:r>
           </a:p>
         </p:txBody>
@@ -4404,14 +4426,26 @@
             <a:r>
               <a:rPr lang="en-US" sz="3823" i="true" spc="573">
                 <a:solidFill>
-                  <a:srgbClr val="8B61C2"/>
+                  <a:srgbClr val="5DB2E7"/>
                 </a:solidFill>
                 <a:latin typeface="Sabon Italics"/>
                 <a:ea typeface="Sabon Italics"/>
                 <a:cs typeface="Sabon Italics"/>
                 <a:sym typeface="Sabon Italics"/>
               </a:rPr>
-              <a:t>INTELIGÊNCIA ARTIFICIAL: </a:t>
+              <a:t>INTELIGÊNCIA ARTIFICIAL:</a:t>
+            </a:r>
+            <a:r>
+              <a:rPr lang="en-US" sz="3823" i="true" spc="573">
+                <a:solidFill>
+                  <a:srgbClr val="8B61C2"/>
+                </a:solidFill>
+                <a:latin typeface="Sabon Italics"/>
+                <a:ea typeface="Sabon Italics"/>
+                <a:cs typeface="Sabon Italics"/>
+                <a:sym typeface="Sabon Italics"/>
+              </a:rPr>
+              <a:t> </a:t>
             </a:r>
             <a:r>
               <a:rPr lang="en-US" sz="3823" i="true" spc="573">
@@ -4457,14 +4491,26 @@
             <a:r>
               <a:rPr lang="en-US" sz="3823" i="true" spc="573">
                 <a:solidFill>
-                  <a:srgbClr val="8B61C2"/>
+                  <a:srgbClr val="5DB2E7"/>
                 </a:solidFill>
                 <a:latin typeface="Sabon Italics"/>
                 <a:ea typeface="Sabon Italics"/>
                 <a:cs typeface="Sabon Italics"/>
                 <a:sym typeface="Sabon Italics"/>
               </a:rPr>
-              <a:t>ROBÓTICA: </a:t>
+              <a:t>ROBÓTICA:</a:t>
+            </a:r>
+            <a:r>
+              <a:rPr lang="en-US" sz="3823" i="true" spc="573">
+                <a:solidFill>
+                  <a:srgbClr val="8B61C2"/>
+                </a:solidFill>
+                <a:latin typeface="Sabon Italics"/>
+                <a:ea typeface="Sabon Italics"/>
+                <a:cs typeface="Sabon Italics"/>
+                <a:sym typeface="Sabon Italics"/>
+              </a:rPr>
+              <a:t> </a:t>
             </a:r>
             <a:r>
               <a:rPr lang="en-US" sz="3823" i="true" spc="573">
@@ -4510,7 +4556,7 @@
             <a:r>
               <a:rPr lang="en-US" sz="3823" i="true" spc="573">
                 <a:solidFill>
-                  <a:srgbClr val="8B61C2"/>
+                  <a:srgbClr val="5DB2E7"/>
                 </a:solidFill>
                 <a:latin typeface="Sabon Italics"/>
                 <a:ea typeface="Sabon Italics"/>
@@ -4563,14 +4609,26 @@
             <a:r>
               <a:rPr lang="en-US" sz="3823" i="true" spc="573">
                 <a:solidFill>
-                  <a:srgbClr val="8B61C2"/>
+                  <a:srgbClr val="5DB2E7"/>
                 </a:solidFill>
                 <a:latin typeface="Sabon Italics"/>
                 <a:ea typeface="Sabon Italics"/>
                 <a:cs typeface="Sabon Italics"/>
                 <a:sym typeface="Sabon Italics"/>
               </a:rPr>
-              <a:t>SAÚDE E CIÊNCIA: </a:t>
+              <a:t>SAÚDE E CIÊNCIA:</a:t>
+            </a:r>
+            <a:r>
+              <a:rPr lang="en-US" sz="3823" i="true" spc="573">
+                <a:solidFill>
+                  <a:srgbClr val="8B61C2"/>
+                </a:solidFill>
+                <a:latin typeface="Sabon Italics"/>
+                <a:ea typeface="Sabon Italics"/>
+                <a:cs typeface="Sabon Italics"/>
+                <a:sym typeface="Sabon Italics"/>
+              </a:rPr>
+              <a:t> </a:t>
             </a:r>
             <a:r>
               <a:rPr lang="en-US" sz="3823" i="true" spc="573">
@@ -4728,7 +4786,7 @@
         <p:spPr>
           <a:xfrm rot="0">
             <a:off x="4145015" y="4024511"/>
-            <a:ext cx="13114285" cy="1543804"/>
+            <a:ext cx="13114285" cy="1535936"/>
           </a:xfrm>
           <a:prstGeom prst="rect">
             <a:avLst/>
@@ -4748,14 +4806,26 @@
             <a:r>
               <a:rPr lang="en-US" sz="3379" i="true" spc="506">
                 <a:solidFill>
-                  <a:srgbClr val="8B61C2"/>
+                  <a:srgbClr val="5DB2E7"/>
                 </a:solidFill>
                 <a:latin typeface="Sabon Italics"/>
                 <a:ea typeface="Sabon Italics"/>
                 <a:cs typeface="Sabon Italics"/>
                 <a:sym typeface="Sabon Italics"/>
               </a:rPr>
-              <a:t>PROCESSANEBTO ASSÍNCRONO: </a:t>
+              <a:t>PROCESSAMENTO ASSÍNCRONO:</a:t>
+            </a:r>
+            <a:r>
+              <a:rPr lang="en-US" sz="3379" i="true" spc="506">
+                <a:solidFill>
+                  <a:srgbClr val="8B61C2"/>
+                </a:solidFill>
+                <a:latin typeface="Sabon Italics"/>
+                <a:ea typeface="Sabon Italics"/>
+                <a:cs typeface="Sabon Italics"/>
+                <a:sym typeface="Sabon Italics"/>
+              </a:rPr>
+              <a:t> </a:t>
             </a:r>
             <a:r>
               <a:rPr lang="en-US" sz="3379" i="true" spc="506">
@@ -4822,7 +4892,7 @@
         <p:spPr>
           <a:xfrm rot="0">
             <a:off x="1028700" y="2391113"/>
-            <a:ext cx="14546976" cy="1552227"/>
+            <a:ext cx="14546976" cy="1555246"/>
           </a:xfrm>
           <a:prstGeom prst="rect">
             <a:avLst/>
@@ -4842,14 +4912,26 @@
             <a:r>
               <a:rPr lang="en-US" sz="3420" i="true" spc="513">
                 <a:solidFill>
-                  <a:srgbClr val="8B61C2"/>
+                  <a:srgbClr val="5DB2E7"/>
                 </a:solidFill>
                 <a:latin typeface="Sabon Italics"/>
                 <a:ea typeface="Sabon Italics"/>
                 <a:cs typeface="Sabon Italics"/>
                 <a:sym typeface="Sabon Italics"/>
               </a:rPr>
-              <a:t>EFICIÊNCIA ENERGÉTICA: </a:t>
+              <a:t>EFICIÊNCIA ENERGÉTICA:</a:t>
+            </a:r>
+            <a:r>
+              <a:rPr lang="en-US" sz="3420" i="true" spc="513">
+                <a:solidFill>
+                  <a:srgbClr val="8B61C2"/>
+                </a:solidFill>
+                <a:latin typeface="Sabon Italics"/>
+                <a:ea typeface="Sabon Italics"/>
+                <a:cs typeface="Sabon Italics"/>
+                <a:sym typeface="Sabon Italics"/>
+              </a:rPr>
+              <a:t> </a:t>
             </a:r>
             <a:r>
               <a:rPr lang="en-US" sz="3420" i="true" spc="513">
@@ -4874,8 +4956,8 @@
         </p:nvSpPr>
         <p:spPr>
           <a:xfrm rot="0">
-            <a:off x="1028700" y="5820727"/>
-            <a:ext cx="13535741" cy="1455241"/>
+            <a:off x="1028700" y="5820728"/>
+            <a:ext cx="13535741" cy="1468120"/>
           </a:xfrm>
           <a:prstGeom prst="rect">
             <a:avLst/>
@@ -4895,14 +4977,26 @@
             <a:r>
               <a:rPr lang="en-US" sz="3200" i="true" spc="480">
                 <a:solidFill>
-                  <a:srgbClr val="8B61C2"/>
+                  <a:srgbClr val="5DB2E7"/>
                 </a:solidFill>
                 <a:latin typeface="Sabon Italics"/>
                 <a:ea typeface="Sabon Italics"/>
                 <a:cs typeface="Sabon Italics"/>
                 <a:sym typeface="Sabon Italics"/>
               </a:rPr>
-              <a:t>APRENDIZADO ADAPTATIVO: </a:t>
+              <a:t>APRENDIZADO ADAPTATIVO:</a:t>
+            </a:r>
+            <a:r>
+              <a:rPr lang="en-US" sz="3200" i="true" spc="480">
+                <a:solidFill>
+                  <a:srgbClr val="8B61C2"/>
+                </a:solidFill>
+                <a:latin typeface="Sabon Italics"/>
+                <a:ea typeface="Sabon Italics"/>
+                <a:cs typeface="Sabon Italics"/>
+                <a:sym typeface="Sabon Italics"/>
+              </a:rPr>
+              <a:t> </a:t>
             </a:r>
             <a:r>
               <a:rPr lang="en-US" sz="3200" i="true" spc="480">
@@ -4948,7 +5042,7 @@
             <a:r>
               <a:rPr lang="en-US" sz="3823" i="true" spc="573">
                 <a:solidFill>
-                  <a:srgbClr val="8B61C2"/>
+                  <a:srgbClr val="5DB2E7"/>
                 </a:solidFill>
                 <a:latin typeface="Sabon Italics"/>
                 <a:ea typeface="Sabon Italics"/>
@@ -4981,6 +5075,482 @@
 </file>
 
 <file path=ppt/slides/slide6.xml><?xml version="1.0" encoding="utf-8"?>
+<p:sld xmlns:p="http://schemas.openxmlformats.org/presentationml/2006/main" xmlns:a="http://schemas.openxmlformats.org/drawingml/2006/main" xmlns:r="http://schemas.openxmlformats.org/officeDocument/2006/relationships">
+  <p:cSld>
+    <p:bg>
+      <p:bgPr>
+        <a:solidFill>
+          <a:srgbClr val="000000"/>
+        </a:solidFill>
+      </p:bgPr>
+    </p:bg>
+    <p:spTree>
+      <p:nvGrpSpPr>
+        <p:cNvPr id="1" name=""/>
+        <p:cNvGrpSpPr/>
+        <p:nvPr/>
+      </p:nvGrpSpPr>
+      <p:grpSpPr>
+        <a:xfrm>
+          <a:off x="0" y="0"/>
+          <a:ext cx="0" cy="0"/>
+          <a:chOff x="0" y="0"/>
+          <a:chExt cx="0" cy="0"/>
+        </a:xfrm>
+      </p:grpSpPr>
+      <p:sp>
+        <p:nvSpPr>
+          <p:cNvPr name="Freeform 2" id="2"/>
+          <p:cNvSpPr/>
+          <p:nvPr/>
+        </p:nvSpPr>
+        <p:spPr>
+          <a:xfrm flipH="false" flipV="false" rot="0">
+            <a:off x="0" y="0"/>
+            <a:ext cx="18288000" cy="12184380"/>
+          </a:xfrm>
+          <a:custGeom>
+            <a:avLst/>
+            <a:gdLst/>
+            <a:ahLst/>
+            <a:cxnLst/>
+            <a:rect r="r" b="b" t="t" l="l"/>
+            <a:pathLst>
+              <a:path h="12184380" w="18288000">
+                <a:moveTo>
+                  <a:pt x="0" y="0"/>
+                </a:moveTo>
+                <a:lnTo>
+                  <a:pt x="18288000" y="0"/>
+                </a:lnTo>
+                <a:lnTo>
+                  <a:pt x="18288000" y="12184380"/>
+                </a:lnTo>
+                <a:lnTo>
+                  <a:pt x="0" y="12184380"/>
+                </a:lnTo>
+                <a:lnTo>
+                  <a:pt x="0" y="0"/>
+                </a:lnTo>
+                <a:close/>
+              </a:path>
+            </a:pathLst>
+          </a:custGeom>
+          <a:blipFill>
+            <a:blip r:embed="rId2">
+              <a:alphaModFix amt="65999"/>
+            </a:blip>
+            <a:stretch>
+              <a:fillRect l="0" t="0" r="0" b="0"/>
+            </a:stretch>
+          </a:blipFill>
+        </p:spPr>
+      </p:sp>
+      <p:sp>
+        <p:nvSpPr>
+          <p:cNvPr name="Freeform 3" id="3"/>
+          <p:cNvSpPr/>
+          <p:nvPr/>
+        </p:nvSpPr>
+        <p:spPr>
+          <a:xfrm flipH="false" flipV="false" rot="0">
+            <a:off x="1264368" y="2591964"/>
+            <a:ext cx="6037526" cy="6562528"/>
+          </a:xfrm>
+          <a:custGeom>
+            <a:avLst/>
+            <a:gdLst/>
+            <a:ahLst/>
+            <a:cxnLst/>
+            <a:rect r="r" b="b" t="t" l="l"/>
+            <a:pathLst>
+              <a:path h="6562528" w="6037526">
+                <a:moveTo>
+                  <a:pt x="0" y="0"/>
+                </a:moveTo>
+                <a:lnTo>
+                  <a:pt x="6037526" y="0"/>
+                </a:lnTo>
+                <a:lnTo>
+                  <a:pt x="6037526" y="6562528"/>
+                </a:lnTo>
+                <a:lnTo>
+                  <a:pt x="0" y="6562528"/>
+                </a:lnTo>
+                <a:lnTo>
+                  <a:pt x="0" y="0"/>
+                </a:lnTo>
+                <a:close/>
+              </a:path>
+            </a:pathLst>
+          </a:custGeom>
+          <a:blipFill>
+            <a:blip r:embed="rId3"/>
+            <a:stretch>
+              <a:fillRect l="0" t="0" r="0" b="0"/>
+            </a:stretch>
+          </a:blipFill>
+        </p:spPr>
+      </p:sp>
+      <p:sp>
+        <p:nvSpPr>
+          <p:cNvPr name="TextBox 4" id="4"/>
+          <p:cNvSpPr txBox="true"/>
+          <p:nvPr/>
+        </p:nvSpPr>
+        <p:spPr>
+          <a:xfrm rot="0">
+            <a:off x="4986095" y="1571625"/>
+            <a:ext cx="8315811" cy="1020339"/>
+          </a:xfrm>
+          <a:prstGeom prst="rect">
+            <a:avLst/>
+          </a:prstGeom>
+        </p:spPr>
+        <p:txBody>
+          <a:bodyPr anchor="t" rtlCol="false" tIns="0" lIns="0" bIns="0" rIns="0">
+            <a:spAutoFit/>
+          </a:bodyPr>
+          <a:lstStyle/>
+          <a:p>
+            <a:pPr algn="ctr">
+              <a:lnSpc>
+                <a:spcPts val="6704"/>
+              </a:lnSpc>
+            </a:pPr>
+            <a:r>
+              <a:rPr lang="en-US" b="true" sz="10314" i="true">
+                <a:solidFill>
+                  <a:srgbClr val="5DB2E7"/>
+                </a:solidFill>
+                <a:latin typeface="Open Sauce Bold Italics"/>
+                <a:ea typeface="Open Sauce Bold Italics"/>
+                <a:cs typeface="Open Sauce Bold Italics"/>
+                <a:sym typeface="Open Sauce Bold Italics"/>
+              </a:rPr>
+              <a:t>Loihi (Intel)</a:t>
+            </a:r>
+          </a:p>
+        </p:txBody>
+      </p:sp>
+      <p:sp>
+        <p:nvSpPr>
+          <p:cNvPr name="TextBox 5" id="5"/>
+          <p:cNvSpPr txBox="true"/>
+          <p:nvPr/>
+        </p:nvSpPr>
+        <p:spPr>
+          <a:xfrm rot="0">
+            <a:off x="7806427" y="3964561"/>
+            <a:ext cx="8546971" cy="2127629"/>
+          </a:xfrm>
+          <a:prstGeom prst="rect">
+            <a:avLst/>
+          </a:prstGeom>
+        </p:spPr>
+        <p:txBody>
+          <a:bodyPr anchor="t" rtlCol="false" tIns="0" lIns="0" bIns="0" rIns="0">
+            <a:spAutoFit/>
+          </a:bodyPr>
+          <a:lstStyle/>
+          <a:p>
+            <a:pPr algn="l">
+              <a:lnSpc>
+                <a:spcPts val="5495"/>
+              </a:lnSpc>
+            </a:pPr>
+            <a:r>
+              <a:rPr lang="en-US" sz="5665" i="true">
+                <a:solidFill>
+                  <a:srgbClr val="FFFFFF"/>
+                </a:solidFill>
+                <a:latin typeface="Open Sauce Italics"/>
+                <a:ea typeface="Open Sauce Italics"/>
+                <a:cs typeface="Open Sauce Italics"/>
+                <a:sym typeface="Open Sauce Italics"/>
+              </a:rPr>
+              <a:t>1000x mais eficiente energéticamente que um CPU comum.</a:t>
+            </a:r>
+          </a:p>
+        </p:txBody>
+      </p:sp>
+      <p:sp>
+        <p:nvSpPr>
+          <p:cNvPr name="TextBox 6" id="6"/>
+          <p:cNvSpPr txBox="true"/>
+          <p:nvPr/>
+        </p:nvSpPr>
+        <p:spPr>
+          <a:xfrm rot="0">
+            <a:off x="7806427" y="6877879"/>
+            <a:ext cx="8546971" cy="1432304"/>
+          </a:xfrm>
+          <a:prstGeom prst="rect">
+            <a:avLst/>
+          </a:prstGeom>
+        </p:spPr>
+        <p:txBody>
+          <a:bodyPr anchor="t" rtlCol="false" tIns="0" lIns="0" bIns="0" rIns="0">
+            <a:spAutoFit/>
+          </a:bodyPr>
+          <a:lstStyle/>
+          <a:p>
+            <a:pPr algn="l">
+              <a:lnSpc>
+                <a:spcPts val="5495"/>
+              </a:lnSpc>
+            </a:pPr>
+            <a:r>
+              <a:rPr lang="en-US" sz="5665" i="true">
+                <a:solidFill>
+                  <a:srgbClr val="FFFFFF"/>
+                </a:solidFill>
+                <a:latin typeface="Open Sauce Italics"/>
+                <a:ea typeface="Open Sauce Italics"/>
+                <a:cs typeface="Open Sauce Italics"/>
+                <a:sym typeface="Open Sauce Italics"/>
+              </a:rPr>
+              <a:t>ITAÚ implementou em sistemas antifraude.</a:t>
+            </a:r>
+          </a:p>
+        </p:txBody>
+      </p:sp>
+    </p:spTree>
+  </p:cSld>
+  <p:clrMapOvr>
+    <a:masterClrMapping/>
+  </p:clrMapOvr>
+</p:sld>
+</file>
+
+<file path=ppt/slides/slide7.xml><?xml version="1.0" encoding="utf-8"?>
+<p:sld xmlns:p="http://schemas.openxmlformats.org/presentationml/2006/main" xmlns:a="http://schemas.openxmlformats.org/drawingml/2006/main" xmlns:r="http://schemas.openxmlformats.org/officeDocument/2006/relationships">
+  <p:cSld>
+    <p:bg>
+      <p:bgPr>
+        <a:solidFill>
+          <a:srgbClr val="000000"/>
+        </a:solidFill>
+      </p:bgPr>
+    </p:bg>
+    <p:spTree>
+      <p:nvGrpSpPr>
+        <p:cNvPr id="1" name=""/>
+        <p:cNvGrpSpPr/>
+        <p:nvPr/>
+      </p:nvGrpSpPr>
+      <p:grpSpPr>
+        <a:xfrm>
+          <a:off x="0" y="0"/>
+          <a:ext cx="0" cy="0"/>
+          <a:chOff x="0" y="0"/>
+          <a:chExt cx="0" cy="0"/>
+        </a:xfrm>
+      </p:grpSpPr>
+      <p:sp>
+        <p:nvSpPr>
+          <p:cNvPr name="Freeform 2" id="2"/>
+          <p:cNvSpPr/>
+          <p:nvPr/>
+        </p:nvSpPr>
+        <p:spPr>
+          <a:xfrm flipH="false" flipV="false" rot="0">
+            <a:off x="0" y="0"/>
+            <a:ext cx="18288000" cy="12184380"/>
+          </a:xfrm>
+          <a:custGeom>
+            <a:avLst/>
+            <a:gdLst/>
+            <a:ahLst/>
+            <a:cxnLst/>
+            <a:rect r="r" b="b" t="t" l="l"/>
+            <a:pathLst>
+              <a:path h="12184380" w="18288000">
+                <a:moveTo>
+                  <a:pt x="0" y="0"/>
+                </a:moveTo>
+                <a:lnTo>
+                  <a:pt x="18288000" y="0"/>
+                </a:lnTo>
+                <a:lnTo>
+                  <a:pt x="18288000" y="12184380"/>
+                </a:lnTo>
+                <a:lnTo>
+                  <a:pt x="0" y="12184380"/>
+                </a:lnTo>
+                <a:lnTo>
+                  <a:pt x="0" y="0"/>
+                </a:lnTo>
+                <a:close/>
+              </a:path>
+            </a:pathLst>
+          </a:custGeom>
+          <a:blipFill>
+            <a:blip r:embed="rId2">
+              <a:alphaModFix amt="65999"/>
+            </a:blip>
+            <a:stretch>
+              <a:fillRect l="0" t="0" r="0" b="0"/>
+            </a:stretch>
+          </a:blipFill>
+        </p:spPr>
+      </p:sp>
+      <p:sp>
+        <p:nvSpPr>
+          <p:cNvPr name="Freeform 3" id="3"/>
+          <p:cNvSpPr/>
+          <p:nvPr/>
+        </p:nvSpPr>
+        <p:spPr>
+          <a:xfrm flipH="true" flipV="false" rot="0">
+            <a:off x="-135208" y="0"/>
+            <a:ext cx="8839438" cy="9258300"/>
+          </a:xfrm>
+          <a:custGeom>
+            <a:avLst/>
+            <a:gdLst/>
+            <a:ahLst/>
+            <a:cxnLst/>
+            <a:rect r="r" b="b" t="t" l="l"/>
+            <a:pathLst>
+              <a:path h="9258300" w="8839438">
+                <a:moveTo>
+                  <a:pt x="8839437" y="0"/>
+                </a:moveTo>
+                <a:lnTo>
+                  <a:pt x="0" y="0"/>
+                </a:lnTo>
+                <a:lnTo>
+                  <a:pt x="0" y="9258300"/>
+                </a:lnTo>
+                <a:lnTo>
+                  <a:pt x="8839437" y="9258300"/>
+                </a:lnTo>
+                <a:lnTo>
+                  <a:pt x="8839437" y="0"/>
+                </a:lnTo>
+                <a:close/>
+              </a:path>
+            </a:pathLst>
+          </a:custGeom>
+          <a:blipFill>
+            <a:blip r:embed="rId3"/>
+            <a:stretch>
+              <a:fillRect l="0" t="0" r="0" b="0"/>
+            </a:stretch>
+          </a:blipFill>
+        </p:spPr>
+      </p:sp>
+      <p:sp>
+        <p:nvSpPr>
+          <p:cNvPr name="TextBox 4" id="4"/>
+          <p:cNvSpPr txBox="true"/>
+          <p:nvPr/>
+        </p:nvSpPr>
+        <p:spPr>
+          <a:xfrm rot="0">
+            <a:off x="8253874" y="1817303"/>
+            <a:ext cx="9165057" cy="1345935"/>
+          </a:xfrm>
+          <a:prstGeom prst="rect">
+            <a:avLst/>
+          </a:prstGeom>
+        </p:spPr>
+        <p:txBody>
+          <a:bodyPr anchor="t" rtlCol="false" tIns="0" lIns="0" bIns="0" rIns="0">
+            <a:spAutoFit/>
+          </a:bodyPr>
+          <a:lstStyle/>
+          <a:p>
+            <a:pPr algn="ctr">
+              <a:lnSpc>
+                <a:spcPts val="4473"/>
+              </a:lnSpc>
+            </a:pPr>
+            <a:r>
+              <a:rPr lang="en-US" b="true" sz="6881" i="true" spc="1224">
+                <a:solidFill>
+                  <a:srgbClr val="5DB2E7"/>
+                </a:solidFill>
+                <a:latin typeface="Open Sauce Bold Italics"/>
+                <a:ea typeface="Open Sauce Bold Italics"/>
+                <a:cs typeface="Open Sauce Bold Italics"/>
+                <a:sym typeface="Open Sauce Bold Italics"/>
+              </a:rPr>
+              <a:t>K-FLEX </a:t>
+            </a:r>
+          </a:p>
+          <a:p>
+            <a:pPr algn="ctr">
+              <a:lnSpc>
+                <a:spcPts val="6056"/>
+              </a:lnSpc>
+            </a:pPr>
+            <a:r>
+              <a:rPr lang="en-US" b="true" sz="6881" i="true" spc="392">
+                <a:solidFill>
+                  <a:srgbClr val="5DB2E7"/>
+                </a:solidFill>
+                <a:latin typeface="Open Sauce Bold Italics"/>
+                <a:ea typeface="Open Sauce Bold Italics"/>
+                <a:cs typeface="Open Sauce Bold Italics"/>
+                <a:sym typeface="Open Sauce Bold Italics"/>
+              </a:rPr>
+              <a:t>(Coréia do Sul)</a:t>
+            </a:r>
+          </a:p>
+        </p:txBody>
+      </p:sp>
+      <p:sp>
+        <p:nvSpPr>
+          <p:cNvPr name="TextBox 5" id="5"/>
+          <p:cNvSpPr txBox="true"/>
+          <p:nvPr/>
+        </p:nvSpPr>
+        <p:spPr>
+          <a:xfrm rot="0">
+            <a:off x="9303631" y="4352838"/>
+            <a:ext cx="8115300" cy="3469180"/>
+          </a:xfrm>
+          <a:prstGeom prst="rect">
+            <a:avLst/>
+          </a:prstGeom>
+        </p:spPr>
+        <p:txBody>
+          <a:bodyPr anchor="t" rtlCol="false" tIns="0" lIns="0" bIns="0" rIns="0">
+            <a:spAutoFit/>
+          </a:bodyPr>
+          <a:lstStyle/>
+          <a:p>
+            <a:pPr algn="l">
+              <a:lnSpc>
+                <a:spcPts val="5478"/>
+              </a:lnSpc>
+            </a:pPr>
+            <a:r>
+              <a:rPr lang="en-US" sz="4454" i="true">
+                <a:solidFill>
+                  <a:srgbClr val="FFFFFF"/>
+                </a:solidFill>
+                <a:latin typeface="Open Sauce Italics"/>
+                <a:ea typeface="Open Sauce Italics"/>
+                <a:cs typeface="Open Sauce Italics"/>
+                <a:sym typeface="Open Sauce Italics"/>
+              </a:rPr>
+              <a:t>ROBÔ CIRÚRGICO ESPECIALISTA NO MANUSEIO DE TECIDOS VIVOS, ATUA SEM DEIXAR CICATRIZES EXTERNAS.</a:t>
+            </a:r>
+          </a:p>
+        </p:txBody>
+      </p:sp>
+    </p:spTree>
+  </p:cSld>
+  <p:clrMapOvr>
+    <a:masterClrMapping/>
+  </p:clrMapOvr>
+</p:sld>
+</file>
+
+<file path=ppt/slides/slide8.xml><?xml version="1.0" encoding="utf-8"?>
 <p:sld xmlns:p="http://schemas.openxmlformats.org/presentationml/2006/main" xmlns:a="http://schemas.openxmlformats.org/drawingml/2006/main" xmlns:r="http://schemas.openxmlformats.org/officeDocument/2006/relationships">
   <p:cSld>
     <p:spTree>
@@ -5051,10 +5621,10 @@
         </p:nvGrpSpPr>
         <p:grpSpPr>
           <a:xfrm rot="0">
-            <a:off x="4900647" y="5143500"/>
-            <a:ext cx="9340012" cy="2234229"/>
+            <a:off x="4450291" y="4028889"/>
+            <a:ext cx="11682417" cy="2794557"/>
             <a:chOff x="0" y="0"/>
-            <a:chExt cx="12453349" cy="2978972"/>
+            <a:chExt cx="15576556" cy="3726077"/>
           </a:xfrm>
         </p:grpSpPr>
         <p:sp>
@@ -5066,7 +5636,7 @@
           <p:spPr>
             <a:xfrm flipH="false" flipV="false" rot="0">
               <a:off x="0" y="0"/>
-              <a:ext cx="648088" cy="642417"/>
+              <a:ext cx="810624" cy="803531"/>
             </a:xfrm>
             <a:custGeom>
               <a:avLst/>
@@ -5075,18 +5645,18 @@
               <a:cxnLst/>
               <a:rect r="r" b="b" t="t" l="l"/>
               <a:pathLst>
-                <a:path h="642417" w="648088">
+                <a:path h="803531" w="810624">
                   <a:moveTo>
                     <a:pt x="0" y="0"/>
                   </a:moveTo>
                   <a:lnTo>
-                    <a:pt x="648088" y="0"/>
+                    <a:pt x="810624" y="0"/>
                   </a:lnTo>
                   <a:lnTo>
-                    <a:pt x="648088" y="642417"/>
+                    <a:pt x="810624" y="803531"/>
                   </a:lnTo>
                   <a:lnTo>
-                    <a:pt x="0" y="642417"/>
+                    <a:pt x="0" y="803531"/>
                   </a:lnTo>
                   <a:lnTo>
                     <a:pt x="0" y="0"/>
@@ -5117,8 +5687,8 @@
           </p:nvSpPr>
           <p:spPr>
             <a:xfrm rot="0">
-              <a:off x="949655" y="-57150"/>
-              <a:ext cx="11503694" cy="3036122"/>
+              <a:off x="1187822" y="-76200"/>
+              <a:ext cx="14388735" cy="3802277"/>
             </a:xfrm>
             <a:prstGeom prst="rect">
               <a:avLst/>
@@ -5132,11 +5702,11 @@
             <a:p>
               <a:pPr algn="just">
                 <a:lnSpc>
-                  <a:spcPts val="4424"/>
+                  <a:spcPts val="5533"/>
                 </a:lnSpc>
               </a:pPr>
               <a:r>
-                <a:rPr lang="en-US" sz="3847" i="true" spc="577">
+                <a:rPr lang="en-US" sz="4811" i="true" spc="721">
                   <a:solidFill>
                     <a:srgbClr val="FFFFFF"/>
                   </a:solidFill>
@@ -5151,11 +5721,11 @@
             <a:p>
               <a:pPr algn="just">
                 <a:lnSpc>
-                  <a:spcPts val="4424"/>
+                  <a:spcPts val="5533"/>
                 </a:lnSpc>
               </a:pPr>
               <a:r>
-                <a:rPr lang="en-US" sz="3847" i="true" spc="577">
+                <a:rPr lang="en-US" sz="4811" i="true" spc="721">
                   <a:solidFill>
                     <a:srgbClr val="FFFFFF"/>
                   </a:solidFill>
@@ -5170,11 +5740,11 @@
             <a:p>
               <a:pPr algn="just">
                 <a:lnSpc>
-                  <a:spcPts val="4424"/>
+                  <a:spcPts val="5533"/>
                 </a:lnSpc>
               </a:pPr>
               <a:r>
-                <a:rPr lang="en-US" sz="3847" i="true" spc="577">
+                <a:rPr lang="en-US" sz="4811" i="true" spc="721">
                   <a:solidFill>
                     <a:srgbClr val="FFFFFF"/>
                   </a:solidFill>
@@ -5189,11 +5759,11 @@
             <a:p>
               <a:pPr algn="just">
                 <a:lnSpc>
-                  <a:spcPts val="4424"/>
+                  <a:spcPts val="5533"/>
                 </a:lnSpc>
               </a:pPr>
               <a:r>
-                <a:rPr lang="en-US" sz="3847" i="true" spc="577">
+                <a:rPr lang="en-US" sz="4811" i="true" spc="721">
                   <a:solidFill>
                     <a:srgbClr val="FFFFFF"/>
                   </a:solidFill>
@@ -5202,7 +5772,7 @@
                   <a:cs typeface="Sabon Italics"/>
                   <a:sym typeface="Sabon Italics"/>
                 </a:rPr>
-                <a:t>JACKSON</a:t>
+                <a:t>JACKSON LUIZ CORONETTI</a:t>
               </a:r>
             </a:p>
           </p:txBody>
@@ -5215,8 +5785,8 @@
           </p:nvSpPr>
           <p:spPr>
             <a:xfrm flipH="false" flipV="false" rot="0">
-              <a:off x="0" y="765250"/>
-              <a:ext cx="648088" cy="642417"/>
+              <a:off x="0" y="957169"/>
+              <a:ext cx="810624" cy="803531"/>
             </a:xfrm>
             <a:custGeom>
               <a:avLst/>
@@ -5225,18 +5795,18 @@
               <a:cxnLst/>
               <a:rect r="r" b="b" t="t" l="l"/>
               <a:pathLst>
-                <a:path h="642417" w="648088">
+                <a:path h="803531" w="810624">
                   <a:moveTo>
                     <a:pt x="0" y="0"/>
                   </a:moveTo>
                   <a:lnTo>
-                    <a:pt x="648088" y="0"/>
+                    <a:pt x="810624" y="0"/>
                   </a:lnTo>
                   <a:lnTo>
-                    <a:pt x="648088" y="642417"/>
+                    <a:pt x="810624" y="803531"/>
                   </a:lnTo>
                   <a:lnTo>
-                    <a:pt x="0" y="642417"/>
+                    <a:pt x="0" y="803531"/>
                   </a:lnTo>
                   <a:lnTo>
                     <a:pt x="0" y="0"/>
@@ -5267,8 +5837,8 @@
           </p:nvSpPr>
           <p:spPr>
             <a:xfrm flipH="false" flipV="false" rot="0">
-              <a:off x="0" y="1523738"/>
-              <a:ext cx="648088" cy="642417"/>
+              <a:off x="0" y="1905880"/>
+              <a:ext cx="810624" cy="803531"/>
             </a:xfrm>
             <a:custGeom>
               <a:avLst/>
@@ -5277,18 +5847,18 @@
               <a:cxnLst/>
               <a:rect r="r" b="b" t="t" l="l"/>
               <a:pathLst>
-                <a:path h="642417" w="648088">
+                <a:path h="803531" w="810624">
                   <a:moveTo>
                     <a:pt x="0" y="0"/>
                   </a:moveTo>
                   <a:lnTo>
-                    <a:pt x="648088" y="0"/>
+                    <a:pt x="810624" y="0"/>
                   </a:lnTo>
                   <a:lnTo>
-                    <a:pt x="648088" y="642417"/>
+                    <a:pt x="810624" y="803530"/>
                   </a:lnTo>
                   <a:lnTo>
-                    <a:pt x="0" y="642417"/>
+                    <a:pt x="0" y="803530"/>
                   </a:lnTo>
                   <a:lnTo>
                     <a:pt x="0" y="0"/>
@@ -5319,8 +5889,8 @@
           </p:nvSpPr>
           <p:spPr>
             <a:xfrm flipH="false" flipV="false" rot="0">
-              <a:off x="0" y="2282225"/>
-              <a:ext cx="648088" cy="642417"/>
+              <a:off x="0" y="2854590"/>
+              <a:ext cx="810624" cy="803531"/>
             </a:xfrm>
             <a:custGeom>
               <a:avLst/>
@@ -5329,18 +5899,18 @@
               <a:cxnLst/>
               <a:rect r="r" b="b" t="t" l="l"/>
               <a:pathLst>
-                <a:path h="642417" w="648088">
+                <a:path h="803531" w="810624">
                   <a:moveTo>
                     <a:pt x="0" y="0"/>
                   </a:moveTo>
                   <a:lnTo>
-                    <a:pt x="648088" y="0"/>
+                    <a:pt x="810624" y="0"/>
                   </a:lnTo>
                   <a:lnTo>
-                    <a:pt x="648088" y="642417"/>
+                    <a:pt x="810624" y="803531"/>
                   </a:lnTo>
                   <a:lnTo>
-                    <a:pt x="0" y="642417"/>
+                    <a:pt x="0" y="803531"/>
                   </a:lnTo>
                   <a:lnTo>
                     <a:pt x="0" y="0"/>
@@ -5445,7 +6015,7 @@
             <a:r>
               <a:rPr lang="en-US" sz="5852" i="true" spc="877">
                 <a:solidFill>
-                  <a:srgbClr val="8B61C2"/>
+                  <a:srgbClr val="5DB2E7"/>
                 </a:solidFill>
                 <a:latin typeface="Sabon Italics"/>
                 <a:ea typeface="Sabon Italics"/>
@@ -5465,8 +6035,8 @@
         </p:nvSpPr>
         <p:spPr>
           <a:xfrm rot="0">
-            <a:off x="2581945" y="2432008"/>
-            <a:ext cx="13124111" cy="1784755"/>
+            <a:off x="2562753" y="1724025"/>
+            <a:ext cx="13162495" cy="1788082"/>
           </a:xfrm>
           <a:prstGeom prst="rect">
             <a:avLst/>
@@ -5480,13 +6050,13 @@
           <a:p>
             <a:pPr algn="ctr">
               <a:lnSpc>
-                <a:spcPts val="10581"/>
+                <a:spcPts val="10611"/>
               </a:lnSpc>
             </a:pPr>
             <a:r>
-              <a:rPr lang="en-US" b="true" sz="16278" i="true">
-                <a:solidFill>
-                  <a:srgbClr val="8B61C2"/>
+              <a:rPr lang="en-US" b="true" sz="16326" i="true">
+                <a:solidFill>
+                  <a:srgbClr val="5DB2E7"/>
                 </a:solidFill>
                 <a:latin typeface="Migra Ultra-Bold Italics"/>
                 <a:ea typeface="Migra Ultra-Bold Italics"/>
